--- a/curso/pptx/S22.pptx
+++ b/curso/pptx/S22.pptx
@@ -4817,7 +4817,7 @@
                 </a:solidFill>
                 <a:latin typeface="Nunito Sans"/>
               </a:rPr>
-              <a:t>Casualidad:</a:t>
+              <a:t>巧合：</a:t>
             </a:r>
             <a:r>
               <a:rPr sz="2800" b="0">
@@ -4826,7 +4826,7 @@
                 </a:solidFill>
                 <a:latin typeface="Nunito Sans"/>
               </a:rPr>
-              <a:t> pasaron juntas por azar</a:t>
+              <a:t>它们只是碰巧同时发生</a:t>
             </a:r>
           </a:p>
           <a:p>
@@ -4851,7 +4851,7 @@
                 </a:solidFill>
                 <a:latin typeface="Nunito Sans"/>
               </a:rPr>
-              <a:t>Una tercera causa:</a:t>
+              <a:t>第三个原因：</a:t>
             </a:r>
             <a:r>
               <a:rPr sz="2800" b="0">
@@ -4860,7 +4860,7 @@
                 </a:solidFill>
                 <a:latin typeface="Nunito Sans"/>
               </a:rPr>
-              <a:t> el calor sube los helados y las quemaduras</a:t>
+              <a:t>天气热，既让冰淇淋卖得多，也让人更容易被晒伤</a:t>
             </a:r>
           </a:p>
           <a:p>
@@ -4885,7 +4885,7 @@
                 </a:solidFill>
                 <a:latin typeface="Nunito Sans"/>
               </a:rPr>
-              <a:t>Al revés:</a:t>
+              <a:t>反过来：</a:t>
             </a:r>
             <a:r>
               <a:rPr sz="2800" b="0">
@@ -4894,7 +4894,7 @@
                 </a:solidFill>
                 <a:latin typeface="Nunito Sans"/>
               </a:rPr>
-              <a:t> quizá lo que parecía efecto es la causa</a:t>
+              <a:t>也许看起来像结果的东西其实是原因</a:t>
             </a:r>
           </a:p>
         </p:txBody>
@@ -7022,7 +7022,7 @@
                 </a:solidFill>
                 <a:latin typeface="Nunito Sans"/>
               </a:rPr>
-              <a:t>Causa</a:t>
+              <a:t>原因</a:t>
             </a:r>
             <a:r>
               <a:rPr sz="2800" b="0">
@@ -7031,7 +7031,7 @@
                 </a:solidFill>
                 <a:latin typeface="Nunito Sans"/>
               </a:rPr>
-              <a:t>: lo que hace que ocurra otra cosa</a:t>
+              <a:t>：使另一件事发生的东西</a:t>
             </a:r>
           </a:p>
           <a:p>
@@ -7056,7 +7056,7 @@
                 </a:solidFill>
                 <a:latin typeface="Nunito Sans"/>
               </a:rPr>
-              <a:t>En latín, </a:t>
+              <a:t>拉丁语 </a:t>
             </a:r>
             <a:r>
               <a:rPr sz="2800" b="1">
@@ -7074,7 +7074,7 @@
                 </a:solidFill>
                 <a:latin typeface="Nunito Sans"/>
               </a:rPr>
-              <a:t>: «después de esto»</a:t>
+              <a:t> 的意思是：“在这之后”</a:t>
             </a:r>
           </a:p>
           <a:p>
@@ -7099,7 +7099,7 @@
                 </a:solidFill>
                 <a:latin typeface="Nunito Sans"/>
               </a:rPr>
-              <a:t>«Después de» no es «</a:t>
+              <a:t>“在这之后”不等于“</a:t>
             </a:r>
             <a:r>
               <a:rPr sz="2800" b="1">
@@ -7108,7 +7108,7 @@
                 </a:solidFill>
                 <a:latin typeface="Nunito Sans"/>
               </a:rPr>
-              <a:t>por culpa de</a:t>
+              <a:t>因为这个</a:t>
             </a:r>
             <a:r>
               <a:rPr sz="2800" b="0">
@@ -7117,7 +7117,7 @@
                 </a:solidFill>
                 <a:latin typeface="Nunito Sans"/>
               </a:rPr>
-              <a:t>»</a:t>
+              <a:t>”</a:t>
             </a:r>
           </a:p>
           <a:p>
@@ -7142,7 +7142,7 @@
                 </a:solidFill>
                 <a:latin typeface="Nunito Sans"/>
               </a:rPr>
-              <a:t>Pregunta: </a:t>
+              <a:t>问题：</a:t>
             </a:r>
             <a:r>
               <a:rPr sz="2800" b="1">
@@ -7151,7 +7151,7 @@
                 </a:solidFill>
                 <a:latin typeface="Nunito Sans"/>
               </a:rPr>
-              <a:t>¿podría ser casualidad o haber otra causa?</a:t>
+              <a:t>这可能只是巧合，或者还有别的原因吗？</a:t>
             </a:r>
           </a:p>
         </p:txBody>

--- a/curso/pptx/S22.pptx
+++ b/curso/pptx/S22.pptx
@@ -4129,7 +4129,7 @@
                 </a:solidFill>
                 <a:latin typeface="Nunito Sans"/>
               </a:rPr>
-              <a:t>编造的新闻：“在家吃早餐的学生成绩更好”。Iker 得出结论：“吃早餐会让你更聪明”。</a:t>
+              <a:t>编造的新闻：“在家吃早餐的学生成绩更好”。一个男孩得出结论：“吃早餐会让你更聪明”。</a:t>
             </a:r>
           </a:p>
         </p:txBody>
@@ -4438,7 +4438,7 @@
                 </a:solidFill>
                 <a:latin typeface="Nunito Sans"/>
               </a:rPr>
-              <a:t>Maialen 下午不再喝能量饮料，三个星期里都睡得更早。她又开始喝，又睡不好了。</a:t>
+              <a:t>一个女孩下午不再喝能量饮料，三个星期里都睡得更早。她又开始喝，又睡不好了。</a:t>
             </a:r>
           </a:p>
         </p:txBody>
@@ -5080,7 +5080,7 @@
                 </a:solidFill>
                 <a:latin typeface="Nunito Sans"/>
               </a:rPr>
-              <a:t>Chen 第一次吃虾。十分钟后，他的嘴唇肿了起来，皮肤发痒。他妈妈说：“是虾引起的。”</a:t>
+              <a:t>一个男孩第一次吃虾。十分钟后，他的嘴唇肿了起来，皮肤发痒。他妈妈说：“是虾引起的。”</a:t>
             </a:r>
           </a:p>
         </p:txBody>
